--- a/submission/Isnad_Pitch_Phase2.pptx
+++ b/submission/Isnad_Pitch_Phase2.pptx
@@ -7667,7 +7667,7 @@
                 <a:ea typeface="Courier New" pitchFamily="34" charset="-122"/>
                 <a:cs typeface="Courier New" pitchFamily="34" charset="-120"/>
               </a:rPr>
-              <a:t>NINE-STEP JUDGE GUIDE AT submission/JUDGE_GUIDE.md  ·  EACH STEP STATES ITS EXPECTED OUTPUT</a:t>
+              <a:t>TEN-STEP JUDGE GUIDE AT submission/JUDGE_GUIDE.md  ·  EACH STEP STATES ITS EXPECTED OUTPUT</a:t>
             </a:r>
             <a:endParaRPr lang="en-US" sz="950" dirty="0"/>
           </a:p>
